--- a/presentations/W3_progress.pptx
+++ b/presentations/W3_progress.pptx
@@ -10,6 +10,7 @@
     <p:sldId id="258" r:id="rId9"/>
     <p:sldId id="259" r:id="rId10"/>
     <p:sldId id="260" r:id="rId11"/>
+    <p:sldId id="261" r:id="rId12"/>
   </p:sldIdLst>
   <p:sldSz cx="12191695" cy="6858000" type="screen4x3"/>
   <p:notesSz cx="6858000" cy="9144000"/>
@@ -3865,19 +3866,19 @@
           <a:p>
             <a:pPr algn="ctr"/>
             <a:r>
-              <a:rPr sz="1050" b="1">
+              <a:rPr sz="1000" b="1">
                 <a:solidFill>
                   <a:srgbClr val="B86A00"/>
                 </a:solidFill>
                 <a:latin typeface="Calibri"/>
               </a:rPr>
-              <a:t>v2: +static analysis (in progress)</a:t>
+              <a:t>v2: +static analysis (done)</a:t>
             </a:r>
           </a:p>
           <a:p>
             <a:pPr algn="ctr"/>
             <a:r>
-              <a:rPr sz="1050" b="0">
+              <a:rPr sz="1000" b="0">
                 <a:solidFill>
                   <a:srgbClr val="B86A00"/>
                 </a:solidFill>
@@ -3889,13 +3890,25 @@
           <a:p>
             <a:pPr algn="ctr"/>
             <a:r>
-              <a:rPr sz="1050" b="0">
+              <a:rPr sz="1000" b="0">
                 <a:solidFill>
                   <a:srgbClr val="B86A00"/>
                 </a:solidFill>
                 <a:latin typeface="Calibri"/>
               </a:rPr>
-              <a:t>dominance, targeted angr</a:t>
+              <a:t>dominance, targeted angr — 2 cases</a:t>
+            </a:r>
+          </a:p>
+          <a:p>
+            <a:pPr algn="ctr"/>
+            <a:r>
+              <a:rPr sz="1000" b="0">
+                <a:solidFill>
+                  <a:srgbClr val="B86A00"/>
+                </a:solidFill>
+                <a:latin typeface="Calibri"/>
+              </a:rPr>
+              <a:t>accepted as documented limitations</a:t>
             </a:r>
           </a:p>
         </p:txBody>
@@ -4807,43 +4820,43 @@
           <a:p>
             <a:pPr algn="l">
               <a:lnSpc>
-                <a:spcPct val="110000"/>
+                <a:spcPct val="105000"/>
               </a:lnSpc>
             </a:pPr>
             <a:r>
-              <a:rPr sz="1250" b="0" i="0">
+              <a:rPr sz="1150" b="0" i="0">
                 <a:solidFill>
                   <a:srgbClr val="222222"/>
                 </a:solidFill>
                 <a:latin typeface="Calibri"/>
               </a:rPr>
-              <a:t>Added this week (per supervisor guidance — no new algorithms,</a:t>
+              <a:t>Added per supervisor guidance — no new algorithms,</a:t>
             </a:r>
           </a:p>
           <a:p>
             <a:pPr algn="l">
               <a:lnSpc>
-                <a:spcPct val="110000"/>
+                <a:spcPct val="105000"/>
               </a:lnSpc>
             </a:pPr>
             <a:r>
-              <a:rPr sz="1250" b="0" i="0">
+              <a:rPr sz="1150" b="0" i="0">
                 <a:solidFill>
                   <a:srgbClr val="222222"/>
                 </a:solidFill>
                 <a:latin typeface="Calibri"/>
               </a:rPr>
-              <a:t>agent orchestrates existing capabilities):</a:t>
+              <a:t>agent orchestrates existing capabilities:</a:t>
             </a:r>
           </a:p>
           <a:p>
             <a:pPr algn="l">
               <a:lnSpc>
-                <a:spcPct val="110000"/>
+                <a:spcPct val="105000"/>
               </a:lnSpc>
             </a:pPr>
             <a:r>
-              <a:rPr sz="1250" b="0" i="0">
+              <a:rPr sz="1150" b="0" i="0">
                 <a:solidFill>
                   <a:srgbClr val="222222"/>
                 </a:solidFill>
@@ -4855,136 +4868,191 @@
           <a:p>
             <a:pPr algn="l">
               <a:lnSpc>
-                <a:spcPct val="110000"/>
+                <a:spcPct val="105000"/>
               </a:lnSpc>
             </a:pPr>
             <a:r>
-              <a:rPr sz="1250" b="0" i="0">
+              <a:rPr sz="1150" b="0" i="0">
                 <a:solidFill>
                   <a:srgbClr val="222222"/>
                 </a:solidFill>
                 <a:latin typeface="Calibri"/>
               </a:rPr>
-              <a:t>  •  Def-use, slicing, dominance tools</a:t>
+              <a:t>  •  Def-use, slicing, dominance tools + targeted angr</a:t>
             </a:r>
           </a:p>
           <a:p>
             <a:pPr algn="l">
               <a:lnSpc>
-                <a:spcPct val="110000"/>
+                <a:spcPct val="105000"/>
               </a:lnSpc>
             </a:pPr>
             <a:r>
-              <a:rPr sz="1250" b="0" i="0">
+              <a:rPr sz="1150" b="0" i="0">
                 <a:solidFill>
                   <a:srgbClr val="222222"/>
                 </a:solidFill>
                 <a:latin typeface="Calibri"/>
               </a:rPr>
-              <a:t>  •  Targeted angr queries (symbolic execution,</a:t>
+              <a:t>  •  Ingestion bug fixed: the CVE-2021-42386 Tier A miss</a:t>
             </a:r>
           </a:p>
           <a:p>
             <a:pPr algn="l">
               <a:lnSpc>
-                <a:spcPct val="110000"/>
+                <a:spcPct val="105000"/>
               </a:lnSpc>
             </a:pPr>
             <a:r>
-              <a:rPr sz="1250" b="0" i="0">
+              <a:rPr sz="1150" b="0" i="0">
                 <a:solidFill>
                   <a:srgbClr val="222222"/>
                 </a:solidFill>
                 <a:latin typeface="Calibri"/>
               </a:rPr>
-              <a:t>     value-constraint reasoning, indirect-call resolution)</a:t>
+              <a:t>     now actually reaches Tier B</a:t>
             </a:r>
           </a:p>
           <a:p>
             <a:pPr algn="l">
               <a:lnSpc>
-                <a:spcPct val="110000"/>
+                <a:spcPct val="105000"/>
               </a:lnSpc>
             </a:pPr>
-            <a:r>
-              <a:rPr sz="1250" b="0" i="0">
-                <a:solidFill>
-                  <a:srgbClr val="222222"/>
-                </a:solidFill>
-                <a:latin typeface="Calibri"/>
-              </a:rPr>
-              <a:t>  •  Ingestion bug fixed: the CVE-2021-42386 Tier A miss</a:t>
-            </a:r>
           </a:p>
           <a:p>
             <a:pPr algn="l">
               <a:lnSpc>
-                <a:spcPct val="110000"/>
+                <a:spcPct val="105000"/>
               </a:lnSpc>
             </a:pPr>
             <a:r>
-              <a:rPr sz="1250" b="0" i="0">
+              <a:rPr sz="1150" b="0" i="0">
                 <a:solidFill>
                   <a:srgbClr val="222222"/>
                 </a:solidFill>
                 <a:latin typeface="Calibri"/>
               </a:rPr>
-              <a:t>     now actually reaches Tier B</a:t>
+              <a:t>3 verified rounds, each fixing a distinct, confirmed root</a:t>
             </a:r>
           </a:p>
           <a:p>
             <a:pPr algn="l">
               <a:lnSpc>
-                <a:spcPct val="110000"/>
+                <a:spcPct val="105000"/>
               </a:lnSpc>
             </a:pPr>
+            <a:r>
+              <a:rPr sz="1150" b="0" i="0">
+                <a:solidFill>
+                  <a:srgbClr val="222222"/>
+                </a:solidFill>
+                <a:latin typeface="Calibri"/>
+              </a:rPr>
+              <a:t>cause (not re-running hoping for a better roll):</a:t>
+            </a:r>
           </a:p>
           <a:p>
             <a:pPr algn="l">
               <a:lnSpc>
-                <a:spcPct val="110000"/>
+                <a:spcPct val="105000"/>
               </a:lnSpc>
             </a:pPr>
             <a:r>
-              <a:rPr sz="1250" b="0" i="0">
+              <a:rPr sz="1150" b="0" i="0">
                 <a:solidFill>
                   <a:srgbClr val="222222"/>
                 </a:solidFill>
                 <a:latin typeface="Calibri"/>
               </a:rPr>
-              <a:t>First run: 0/3 confirmed — but audit found the new tools</a:t>
+              <a:t>  1.  Tools built but never invoked -&gt; coverage gate added</a:t>
             </a:r>
           </a:p>
           <a:p>
             <a:pPr algn="l">
               <a:lnSpc>
-                <a:spcPct val="110000"/>
+                <a:spcPct val="105000"/>
               </a:lnSpc>
             </a:pPr>
             <a:r>
-              <a:rPr sz="1250" b="0" i="0">
+              <a:rPr sz="1150" b="0" i="0">
                 <a:solidFill>
                   <a:srgbClr val="222222"/>
                 </a:solidFill>
                 <a:latin typeface="Calibri"/>
               </a:rPr>
-              <a:t>(slicing, dominance, angr) were never actually invoked.</a:t>
+              <a:t>  2.  Framing applied once, retry-budget gap -&gt; fixed</a:t>
             </a:r>
           </a:p>
           <a:p>
             <a:pPr algn="l">
               <a:lnSpc>
-                <a:spcPct val="110000"/>
+                <a:spcPct val="105000"/>
               </a:lnSpc>
             </a:pPr>
             <a:r>
-              <a:rPr sz="1250" b="0" i="0">
+              <a:rPr sz="1150" b="0" i="0">
                 <a:solidFill>
                   <a:srgbClr val="222222"/>
                 </a:solidFill>
                 <a:latin typeface="Calibri"/>
               </a:rPr>
-              <a:t>Follow-up run requested with explicit tool-usage guidance.</a:t>
+              <a:t>  3.  Narrower retry gap + a provider content-safety</a:t>
+            </a:r>
+          </a:p>
+          <a:p>
+            <a:pPr algn="l">
+              <a:lnSpc>
+                <a:spcPct val="105000"/>
+              </a:lnSpc>
+            </a:pPr>
+            <a:r>
+              <a:rPr sz="1150" b="0" i="0">
+                <a:solidFill>
+                  <a:srgbClr val="222222"/>
+                </a:solidFill>
+                <a:latin typeface="Calibri"/>
+              </a:rPr>
+              <a:t>      rejection persisting under uniform framing</a:t>
+            </a:r>
+          </a:p>
+          <a:p>
+            <a:pPr algn="l">
+              <a:lnSpc>
+                <a:spcPct val="105000"/>
+              </a:lnSpc>
+            </a:pPr>
+          </a:p>
+          <a:p>
+            <a:pPr algn="l">
+              <a:lnSpc>
+                <a:spcPct val="105000"/>
+              </a:lnSpc>
+            </a:pPr>
+            <a:r>
+              <a:rPr sz="1150" b="0" i="0">
+                <a:solidFill>
+                  <a:srgbClr val="222222"/>
+                </a:solidFill>
+                <a:latin typeface="Calibri"/>
+              </a:rPr>
+              <a:t>CVE-2021-42386 (UAF): all 4 tools genuinely exhausted,</a:t>
+            </a:r>
+          </a:p>
+          <a:p>
+            <a:pPr algn="l">
+              <a:lnSpc>
+                <a:spcPct val="105000"/>
+              </a:lnSpc>
+            </a:pPr>
+            <a:r>
+              <a:rPr sz="1150" b="0" i="0">
+                <a:solidFill>
+                  <a:srgbClr val="222222"/>
+                </a:solidFill>
+                <a:latin typeface="Calibri"/>
+              </a:rPr>
+              <a:t>angr timed out — a complete, non-starved attempt.</a:t>
             </a:r>
           </a:p>
         </p:txBody>
@@ -5038,7 +5106,7 @@
                 </a:solidFill>
                 <a:latin typeface="Calibri"/>
               </a:rPr>
-              <a:t>Known limitation, either version: no SSA / dominators / def-use slicing / symbolic range analysis engine of our own. Targeted angr queries are bounded, agent-directed probes, not exhaustive path-sensitive analysis. If a case genuinely can't be resolved through Ghidra + angr + glue code, it is documented as a limitation rather than triggering a new analysis framework — a deliberate MVP scope decision, not a discovered gap.</a:t>
+              <a:t>Concrete result, not an open bug: CVE-2017-15873 and CVE-2021-42374 are accepted as static-analysis-stage limitations after 3 verified rounds each fixed a genuine, distinct root cause. The final blocker (a provider-side content-safety rejection under uniform defensive framing) is outside prompt/scheduling control. No further static-tools rounds planned — resolution is deferred entirely to dynamic analysis (Stage 9), which is exactly the role that stage was scoped for.</a:t>
             </a:r>
           </a:p>
         </p:txBody>
@@ -5225,11 +5293,11 @@
           <a:p>
             <a:pPr algn="l">
               <a:lnSpc>
-                <a:spcPct val="115000"/>
+                <a:spcPct val="110000"/>
               </a:lnSpc>
             </a:pPr>
             <a:r>
-              <a:rPr sz="1300" b="0" i="0">
+              <a:rPr sz="1250" b="0" i="0">
                 <a:solidFill>
                   <a:srgbClr val="222222"/>
                 </a:solidFill>
@@ -5241,17 +5309,33 @@
           <a:p>
             <a:pPr algn="l">
               <a:lnSpc>
-                <a:spcPct val="115000"/>
+                <a:spcPct val="110000"/>
               </a:lnSpc>
             </a:pPr>
             <a:r>
-              <a:rPr sz="1300" b="0" i="0">
+              <a:rPr sz="1250" b="0" i="0">
                 <a:solidFill>
                   <a:srgbClr val="222222"/>
                 </a:solidFill>
                 <a:latin typeface="Calibri"/>
               </a:rPr>
               <a:t>Phase 2 — generation: seeds are built mechanically from that extraction, no further vulnerability-aware reasoning — so a resulting crash is genuine evidence, not a confirmation of something already known.</a:t>
+            </a:r>
+          </a:p>
+          <a:p>
+            <a:pPr algn="l">
+              <a:lnSpc>
+                <a:spcPct val="110000"/>
+              </a:lnSpc>
+            </a:pPr>
+            <a:r>
+              <a:rPr sz="1250" b="0" i="0">
+                <a:solidFill>
+                  <a:srgbClr val="222222"/>
+                </a:solidFill>
+                <a:latin typeface="Calibri"/>
+              </a:rPr>
+              <a:t>Verification: every harness is built with AddressSanitizer (ASAN); a crash is only reported confirmed if the ASAN report reproduces on the vulnerable binary and is absent on a freshly-built patched binary given the identical input — the ASAN report itself supplies the crash traceback (exact allocation/free/read call chain) used to identify the bug, not just a bare segfault.</a:t>
             </a:r>
           </a:p>
         </p:txBody>
@@ -5264,7 +5348,7 @@
         </p:nvSpPr>
         <p:spPr>
           <a:xfrm>
-            <a:off x="457200" y="3063240"/>
+            <a:off x="457200" y="3246120"/>
             <a:ext cx="11247120" cy="365760"/>
           </a:xfrm>
           <a:prstGeom prst="rect">
@@ -5299,7 +5383,7 @@
         </p:nvSpPr>
         <p:spPr>
           <a:xfrm>
-            <a:off x="640080" y="3474720"/>
+            <a:off x="640080" y="3657600"/>
             <a:ext cx="1828800" cy="868680"/>
           </a:xfrm>
           <a:prstGeom prst="roundRect">
@@ -5375,7 +5459,7 @@
         </p:nvSpPr>
         <p:spPr>
           <a:xfrm>
-            <a:off x="2743200" y="3474720"/>
+            <a:off x="2743200" y="3657600"/>
             <a:ext cx="1737360" cy="868680"/>
           </a:xfrm>
           <a:prstGeom prst="roundRect">
@@ -5453,7 +5537,7 @@
         </p:nvSpPr>
         <p:spPr>
           <a:xfrm>
-            <a:off x="4617720" y="3474720"/>
+            <a:off x="4617720" y="3657600"/>
             <a:ext cx="1737360" cy="868680"/>
           </a:xfrm>
           <a:prstGeom prst="roundRect">
@@ -5531,7 +5615,7 @@
         </p:nvSpPr>
         <p:spPr>
           <a:xfrm>
-            <a:off x="6492240" y="3474720"/>
+            <a:off x="6492240" y="3657600"/>
             <a:ext cx="1737360" cy="868680"/>
           </a:xfrm>
           <a:prstGeom prst="roundRect">
@@ -5609,7 +5693,7 @@
         </p:nvSpPr>
         <p:spPr>
           <a:xfrm>
-            <a:off x="8366760" y="3474720"/>
+            <a:off x="8366760" y="3657600"/>
             <a:ext cx="1737360" cy="868680"/>
           </a:xfrm>
           <a:prstGeom prst="roundRect">
@@ -5687,7 +5771,7 @@
         </p:nvSpPr>
         <p:spPr>
           <a:xfrm>
-            <a:off x="10241280" y="3474720"/>
+            <a:off x="10241280" y="3657600"/>
             <a:ext cx="1737360" cy="868680"/>
           </a:xfrm>
           <a:prstGeom prst="roundRect">
@@ -5765,7 +5849,7 @@
         </p:nvSpPr>
         <p:spPr>
           <a:xfrm>
-            <a:off x="640080" y="4407408"/>
+            <a:off x="640080" y="4590288"/>
             <a:ext cx="10881360" cy="292608"/>
           </a:xfrm>
           <a:prstGeom prst="rect">
@@ -5787,7 +5871,7 @@
                 </a:solidFill>
                 <a:latin typeface="Calibri"/>
               </a:rPr>
-              <a:t>Confirmed = crash reproduces on vulnerable, absent on patched, with the identical input.</a:t>
+              <a:t>Confirmed = ASAN-reported crash reproduces on vulnerable, absent on patched, with the identical input.</a:t>
             </a:r>
           </a:p>
         </p:txBody>
@@ -5800,7 +5884,7 @@
         </p:nvSpPr>
         <p:spPr>
           <a:xfrm>
-            <a:off x="457200" y="4754880"/>
+            <a:off x="457200" y="4956048"/>
             <a:ext cx="11247120" cy="365760"/>
           </a:xfrm>
           <a:prstGeom prst="rect">
@@ -5816,13 +5900,13 @@
           <a:p>
             <a:pPr algn="l"/>
             <a:r>
-              <a:rPr sz="1600" b="1" i="0">
+              <a:rPr sz="1500" b="1" i="0">
                 <a:solidFill>
                   <a:srgbClr val="B86A00"/>
                 </a:solidFill>
                 <a:latin typeface="Calibri"/>
               </a:rPr>
-              <a:t>Planned expansion (per supervisor's request)</a:t>
+              <a:t>Expansion (per supervisor's request)</a:t>
             </a:r>
           </a:p>
         </p:txBody>
@@ -5835,8 +5919,8 @@
         </p:nvSpPr>
         <p:spPr>
           <a:xfrm>
-            <a:off x="640080" y="5120640"/>
-            <a:ext cx="10881360" cy="1188720"/>
+            <a:off x="640080" y="5303520"/>
+            <a:ext cx="10881360" cy="1097280"/>
           </a:xfrm>
           <a:prstGeom prst="rect">
             <a:avLst/>
@@ -5851,33 +5935,33 @@
           <a:p>
             <a:pPr algn="l">
               <a:lnSpc>
-                <a:spcPct val="115000"/>
+                <a:spcPct val="110000"/>
               </a:lnSpc>
             </a:pPr>
             <a:r>
-              <a:rPr sz="1300" b="0" i="0">
+              <a:rPr sz="1250" b="0" i="0">
                 <a:solidFill>
                   <a:srgbClr val="222222"/>
                 </a:solidFill>
                 <a:latin typeface="Calibri"/>
               </a:rPr>
-              <a:t>1.  Random-seed baseline — same harnesses, same budget, purely random seeds — to measure whether guided seeding actually helps (time to first crash, coverage, confirmed-vulnerability count, success rate).</a:t>
+              <a:t>1.  Random-seed baseline — same harnesses/timeout, purely random seeds, no dictionary — in progress (3/5 done). Results and comparison on the next slide.</a:t>
             </a:r>
           </a:p>
           <a:p>
             <a:pPr algn="l">
               <a:lnSpc>
-                <a:spcPct val="115000"/>
+                <a:spcPct val="110000"/>
               </a:lnSpc>
             </a:pPr>
             <a:r>
-              <a:rPr sz="1300" b="0" i="0">
+              <a:rPr sz="1250" b="0" i="0">
                 <a:solidFill>
                   <a:srgbClr val="222222"/>
                 </a:solidFill>
                 <a:latin typeface="Calibri"/>
               </a:rPr>
-              <a:t>2.  Static-analysis-guided seed generation — once codebase-level analysis identifies concrete candidate lines and value constraints, feed those directly into seed generation instead of only specification/documentation.</a:t>
+              <a:t>2.  Static-analysis-guided seed generation — once codebase-level analysis identifies concrete candidate lines and value constraints, feed those directly into seed generation instead of only specification/documentation. Not yet started.</a:t>
             </a:r>
           </a:p>
         </p:txBody>
@@ -5961,6 +6045,833 @@
 </file>
 
 <file path=ppt/slides/slide5.xml><?xml version="1.0" encoding="utf-8"?>
+<p:sld xmlns:a="http://schemas.openxmlformats.org/drawingml/2006/main" xmlns:p="http://schemas.openxmlformats.org/presentationml/2006/main" xmlns:r="http://schemas.openxmlformats.org/officeDocument/2006/relationships">
+  <p:cSld>
+    <p:spTree>
+      <p:nvGrpSpPr>
+        <p:cNvPr id="1" name=""/>
+        <p:cNvGrpSpPr/>
+        <p:nvPr/>
+      </p:nvGrpSpPr>
+      <p:grpSpPr/>
+      <p:sp>
+        <p:nvSpPr>
+          <p:cNvPr id="2" name="TextBox 1"/>
+          <p:cNvSpPr txBox="1"/>
+          <p:nvPr/>
+        </p:nvSpPr>
+        <p:spPr>
+          <a:xfrm>
+            <a:off x="365760" y="228600"/>
+            <a:ext cx="11430000" cy="548640"/>
+          </a:xfrm>
+          <a:prstGeom prst="rect">
+            <a:avLst/>
+          </a:prstGeom>
+          <a:noFill/>
+        </p:spPr>
+        <p:txBody>
+          <a:bodyPr wrap="square" anchor="t">
+            <a:spAutoFit/>
+          </a:bodyPr>
+          <a:lstStyle/>
+          <a:p>
+            <a:pPr algn="l"/>
+            <a:r>
+              <a:rPr sz="2400" b="1" i="0">
+                <a:solidFill>
+                  <a:srgbClr val="1B2A4A"/>
+                </a:solidFill>
+                <a:latin typeface="Calibri"/>
+              </a:rPr>
+              <a:t>Seed-Generation Comparison: Blind LLM Seeds vs. Random Baseline</a:t>
+            </a:r>
+          </a:p>
+        </p:txBody>
+      </p:sp>
+      <p:sp>
+        <p:nvSpPr>
+          <p:cNvPr id="3" name="TextBox 2"/>
+          <p:cNvSpPr txBox="1"/>
+          <p:nvPr/>
+        </p:nvSpPr>
+        <p:spPr>
+          <a:xfrm>
+            <a:off x="365760" y="777240"/>
+            <a:ext cx="11430000" cy="320040"/>
+          </a:xfrm>
+          <a:prstGeom prst="rect">
+            <a:avLst/>
+          </a:prstGeom>
+          <a:noFill/>
+        </p:spPr>
+        <p:txBody>
+          <a:bodyPr wrap="square" anchor="t">
+            <a:spAutoFit/>
+          </a:bodyPr>
+          <a:lstStyle/>
+          <a:p>
+            <a:pPr algn="l"/>
+            <a:r>
+              <a:rPr sz="1200" b="0" i="1">
+                <a:solidFill>
+                  <a:srgbClr val="555555"/>
+                </a:solidFill>
+                <a:latin typeface="Calibri"/>
+              </a:rPr>
+              <a:t>Same harness/build/timeout per case; random baseline uses no dictionary, 3 files of 64 random bytes, isolating seed-generation strategy as the only variable.</a:t>
+            </a:r>
+          </a:p>
+        </p:txBody>
+      </p:sp>
+      <p:graphicFrame>
+        <p:nvGraphicFramePr>
+          <p:cNvPr id="4" name="Table 3"/>
+          <p:cNvGraphicFramePr>
+            <a:graphicFrameLocks noGrp="1"/>
+          </p:cNvGraphicFramePr>
+          <p:nvPr/>
+        </p:nvGraphicFramePr>
+        <p:xfrm>
+          <a:off x="365760" y="1234440"/>
+          <a:ext cx="11338560" cy="4663440"/>
+        </p:xfrm>
+        <a:graphic>
+          <a:graphicData uri="http://schemas.openxmlformats.org/drawingml/2006/table">
+            <a:tbl>
+              <a:tblPr firstRow="1" bandRow="1">
+                <a:tableStyleId>{5C22544A-7EE6-4342-B048-85BDC9FD1C3A}</a:tableStyleId>
+              </a:tblPr>
+              <a:tblGrid>
+                <a:gridCol w="2286000"/>
+                <a:gridCol w="2377440"/>
+                <a:gridCol w="2377440"/>
+                <a:gridCol w="4297680"/>
+              </a:tblGrid>
+              <a:tr h="548640">
+                <a:tc>
+                  <a:txBody>
+                    <a:bodyPr/>
+                    <a:lstStyle/>
+                    <a:p>
+                      <a:pPr algn="ctr"/>
+                      <a:r>
+                        <a:rPr sz="1150" b="1">
+                          <a:solidFill>
+                            <a:srgbClr val="FFFFFF"/>
+                          </a:solidFill>
+                        </a:rPr>
+                        <a:t>CVE (case)</a:t>
+                      </a:r>
+                    </a:p>
+                  </a:txBody>
+                  <a:tcPr anchor="ctr">
+                    <a:solidFill>
+                      <a:srgbClr val="1B2A4A"/>
+                    </a:solidFill>
+                  </a:tcPr>
+                </a:tc>
+                <a:tc>
+                  <a:txBody>
+                    <a:bodyPr/>
+                    <a:lstStyle/>
+                    <a:p>
+                      <a:pPr algn="ctr"/>
+                      <a:r>
+                        <a:rPr sz="1150" b="1">
+                          <a:solidFill>
+                            <a:srgbClr val="FFFFFF"/>
+                          </a:solidFill>
+                        </a:rPr>
+                        <a:t>Blind LLM seeds</a:t>
+                      </a:r>
+                    </a:p>
+                    <a:p>
+                      <a:pPr algn="ctr"/>
+                      <a:r>
+                        <a:rPr sz="1150" b="1">
+                          <a:solidFill>
+                            <a:srgbClr val="FFFFFF"/>
+                          </a:solidFill>
+                        </a:rPr>
+                        <a:t>time to first crash</a:t>
+                      </a:r>
+                    </a:p>
+                  </a:txBody>
+                  <a:tcPr anchor="ctr">
+                    <a:solidFill>
+                      <a:srgbClr val="1B2A4A"/>
+                    </a:solidFill>
+                  </a:tcPr>
+                </a:tc>
+                <a:tc>
+                  <a:txBody>
+                    <a:bodyPr/>
+                    <a:lstStyle/>
+                    <a:p>
+                      <a:pPr algn="ctr"/>
+                      <a:r>
+                        <a:rPr sz="1150" b="1">
+                          <a:solidFill>
+                            <a:srgbClr val="FFFFFF"/>
+                          </a:solidFill>
+                        </a:rPr>
+                        <a:t>Random baseline</a:t>
+                      </a:r>
+                    </a:p>
+                    <a:p>
+                      <a:pPr algn="ctr"/>
+                      <a:r>
+                        <a:rPr sz="1150" b="1">
+                          <a:solidFill>
+                            <a:srgbClr val="FFFFFF"/>
+                          </a:solidFill>
+                        </a:rPr>
+                        <a:t>time to first crash</a:t>
+                      </a:r>
+                    </a:p>
+                  </a:txBody>
+                  <a:tcPr anchor="ctr">
+                    <a:solidFill>
+                      <a:srgbClr val="1B2A4A"/>
+                    </a:solidFill>
+                  </a:tcPr>
+                </a:tc>
+                <a:tc>
+                  <a:txBody>
+                    <a:bodyPr/>
+                    <a:lstStyle/>
+                    <a:p>
+                      <a:pPr algn="ctr"/>
+                      <a:r>
+                        <a:rPr sz="1150" b="1">
+                          <a:solidFill>
+                            <a:srgbClr val="FFFFFF"/>
+                          </a:solidFill>
+                        </a:rPr>
+                        <a:t>Result</a:t>
+                      </a:r>
+                    </a:p>
+                  </a:txBody>
+                  <a:tcPr anchor="ctr">
+                    <a:solidFill>
+                      <a:srgbClr val="1B2A4A"/>
+                    </a:solidFill>
+                  </a:tcPr>
+                </a:tc>
+              </a:tr>
+              <a:tr h="822960">
+                <a:tc>
+                  <a:txBody>
+                    <a:bodyPr/>
+                    <a:lstStyle/>
+                    <a:p>
+                      <a:pPr algn="l"/>
+                      <a:r>
+                        <a:rPr sz="950" b="1">
+                          <a:solidFill>
+                            <a:srgbClr val="1B2A4A"/>
+                          </a:solidFill>
+                        </a:rPr>
+                        <a:t>CVE-2021-42373 (man)</a:t>
+                      </a:r>
+                    </a:p>
+                  </a:txBody>
+                  <a:tcPr anchor="ctr">
+                    <a:solidFill>
+                      <a:srgbClr val="FFFFFF"/>
+                    </a:solidFill>
+                  </a:tcPr>
+                </a:tc>
+                <a:tc>
+                  <a:txBody>
+                    <a:bodyPr/>
+                    <a:lstStyle/>
+                    <a:p>
+                      <a:pPr algn="l"/>
+                      <a:r>
+                        <a:rPr sz="950" b="0">
+                          <a:solidFill>
+                            <a:srgbClr val="222222"/>
+                          </a:solidFill>
+                        </a:rPr>
+                        <a:t>~5.7s (845 execs)</a:t>
+                      </a:r>
+                    </a:p>
+                  </a:txBody>
+                  <a:tcPr anchor="ctr">
+                    <a:solidFill>
+                      <a:srgbClr val="FFFFFF"/>
+                    </a:solidFill>
+                  </a:tcPr>
+                </a:tc>
+                <a:tc>
+                  <a:txBody>
+                    <a:bodyPr/>
+                    <a:lstStyle/>
+                    <a:p>
+                      <a:pPr algn="l"/>
+                      <a:r>
+                        <a:rPr sz="950" b="0">
+                          <a:solidFill>
+                            <a:srgbClr val="222222"/>
+                          </a:solidFill>
+                        </a:rPr>
+                        <a:t>~71.8s (15,941 execs)</a:t>
+                      </a:r>
+                    </a:p>
+                  </a:txBody>
+                  <a:tcPr anchor="ctr">
+                    <a:solidFill>
+                      <a:srgbClr val="FFFFFF"/>
+                    </a:solidFill>
+                  </a:tcPr>
+                </a:tc>
+                <a:tc>
+                  <a:txBody>
+                    <a:bodyPr/>
+                    <a:lstStyle/>
+                    <a:p>
+                      <a:pPr algn="l"/>
+                      <a:r>
+                        <a:rPr sz="950" b="0">
+                          <a:solidFill>
+                            <a:srgbClr val="222222"/>
+                          </a:solidFill>
+                        </a:rPr>
+                        <a:t>Blind ~12.6x faster, ~19x fewer execs — both confirmed, absent on patched</a:t>
+                      </a:r>
+                    </a:p>
+                  </a:txBody>
+                  <a:tcPr anchor="ctr">
+                    <a:solidFill>
+                      <a:srgbClr val="FFFFFF"/>
+                    </a:solidFill>
+                  </a:tcPr>
+                </a:tc>
+              </a:tr>
+              <a:tr h="822960">
+                <a:tc>
+                  <a:txBody>
+                    <a:bodyPr/>
+                    <a:lstStyle/>
+                    <a:p>
+                      <a:pPr algn="l"/>
+                      <a:r>
+                        <a:rPr sz="950" b="1">
+                          <a:solidFill>
+                            <a:srgbClr val="1B2A4A"/>
+                          </a:solidFill>
+                        </a:rPr>
+                        <a:t>CVE-2026-29004 (udhcpc6)</a:t>
+                      </a:r>
+                    </a:p>
+                  </a:txBody>
+                  <a:tcPr anchor="ctr">
+                    <a:solidFill>
+                      <a:srgbClr val="E8F0FB"/>
+                    </a:solidFill>
+                  </a:tcPr>
+                </a:tc>
+                <a:tc>
+                  <a:txBody>
+                    <a:bodyPr/>
+                    <a:lstStyle/>
+                    <a:p>
+                      <a:pPr algn="l"/>
+                      <a:r>
+                        <a:rPr sz="950" b="0">
+                          <a:solidFill>
+                            <a:srgbClr val="222222"/>
+                          </a:solidFill>
+                        </a:rPr>
+                        <a:t>~372.8s (81,087 execs)</a:t>
+                      </a:r>
+                    </a:p>
+                  </a:txBody>
+                  <a:tcPr anchor="ctr">
+                    <a:solidFill>
+                      <a:srgbClr val="E8F0FB"/>
+                    </a:solidFill>
+                  </a:tcPr>
+                </a:tc>
+                <a:tc>
+                  <a:txBody>
+                    <a:bodyPr/>
+                    <a:lstStyle/>
+                    <a:p>
+                      <a:pPr algn="l"/>
+                      <a:r>
+                        <a:rPr sz="950" b="0">
+                          <a:solidFill>
+                            <a:srgbClr val="222222"/>
+                          </a:solidFill>
+                        </a:rPr>
+                        <a:t>~93.2s (14,255 execs)</a:t>
+                      </a:r>
+                    </a:p>
+                  </a:txBody>
+                  <a:tcPr anchor="ctr">
+                    <a:solidFill>
+                      <a:srgbClr val="E8F0FB"/>
+                    </a:solidFill>
+                  </a:tcPr>
+                </a:tc>
+                <a:tc>
+                  <a:txBody>
+                    <a:bodyPr/>
+                    <a:lstStyle/>
+                    <a:p>
+                      <a:pPr algn="l"/>
+                      <a:r>
+                        <a:rPr sz="950" b="0">
+                          <a:solidFill>
+                            <a:srgbClr val="222222"/>
+                          </a:solidFill>
+                        </a:rPr>
+                        <a:t>Random ~4x faster — LLM seed advantage did not generalize here; both confirmed</a:t>
+                      </a:r>
+                    </a:p>
+                  </a:txBody>
+                  <a:tcPr anchor="ctr">
+                    <a:solidFill>
+                      <a:srgbClr val="E8F0FB"/>
+                    </a:solidFill>
+                  </a:tcPr>
+                </a:tc>
+              </a:tr>
+              <a:tr h="822960">
+                <a:tc>
+                  <a:txBody>
+                    <a:bodyPr/>
+                    <a:lstStyle/>
+                    <a:p>
+                      <a:pPr algn="l"/>
+                      <a:r>
+                        <a:rPr sz="950" b="1">
+                          <a:solidFill>
+                            <a:srgbClr val="1B2A4A"/>
+                          </a:solidFill>
+                        </a:rPr>
+                        <a:t>CVE-2021-42374 (unlzma)</a:t>
+                      </a:r>
+                    </a:p>
+                  </a:txBody>
+                  <a:tcPr anchor="ctr">
+                    <a:solidFill>
+                      <a:srgbClr val="FFFFFF"/>
+                    </a:solidFill>
+                  </a:tcPr>
+                </a:tc>
+                <a:tc>
+                  <a:txBody>
+                    <a:bodyPr/>
+                    <a:lstStyle/>
+                    <a:p>
+                      <a:pPr algn="l"/>
+                      <a:r>
+                        <a:rPr sz="950" b="0">
+                          <a:solidFill>
+                            <a:srgbClr val="222222"/>
+                          </a:solidFill>
+                        </a:rPr>
+                        <a:t>~4,824.5s / ~80.4 min</a:t>
+                      </a:r>
+                    </a:p>
+                    <a:p>
+                      <a:pPr algn="l"/>
+                      <a:r>
+                        <a:rPr sz="950" b="0">
+                          <a:solidFill>
+                            <a:srgbClr val="222222"/>
+                          </a:solidFill>
+                        </a:rPr>
+                        <a:t>(175,710 execs)</a:t>
+                      </a:r>
+                    </a:p>
+                  </a:txBody>
+                  <a:tcPr anchor="ctr">
+                    <a:solidFill>
+                      <a:srgbClr val="FFFFFF"/>
+                    </a:solidFill>
+                  </a:tcPr>
+                </a:tc>
+                <a:tc>
+                  <a:txBody>
+                    <a:bodyPr/>
+                    <a:lstStyle/>
+                    <a:p>
+                      <a:pPr algn="l"/>
+                      <a:r>
+                        <a:rPr sz="950" b="0">
+                          <a:solidFill>
+                            <a:srgbClr val="222222"/>
+                          </a:solidFill>
+                        </a:rPr>
+                        <a:t>Running now</a:t>
+                      </a:r>
+                    </a:p>
+                  </a:txBody>
+                  <a:tcPr anchor="ctr">
+                    <a:solidFill>
+                      <a:srgbClr val="FFFFFF"/>
+                    </a:solidFill>
+                  </a:tcPr>
+                </a:tc>
+                <a:tc>
+                  <a:txBody>
+                    <a:bodyPr/>
+                    <a:lstStyle/>
+                    <a:p>
+                      <a:pPr algn="l"/>
+                      <a:r>
+                        <a:rPr sz="950" b="0">
+                          <a:solidFill>
+                            <a:srgbClr val="222222"/>
+                          </a:solidFill>
+                        </a:rPr>
+                        <a:t>Blind confirmed (82 min); random baseline in progress</a:t>
+                      </a:r>
+                    </a:p>
+                  </a:txBody>
+                  <a:tcPr anchor="ctr">
+                    <a:solidFill>
+                      <a:srgbClr val="FFFFFF"/>
+                    </a:solidFill>
+                  </a:tcPr>
+                </a:tc>
+              </a:tr>
+              <a:tr h="822960">
+                <a:tc>
+                  <a:txBody>
+                    <a:bodyPr/>
+                    <a:lstStyle/>
+                    <a:p>
+                      <a:pPr algn="l"/>
+                      <a:r>
+                        <a:rPr sz="950" b="1">
+                          <a:solidFill>
+                            <a:srgbClr val="1B2A4A"/>
+                          </a:solidFill>
+                        </a:rPr>
+                        <a:t>CVE-2017-15873 (bunzip2)</a:t>
+                      </a:r>
+                    </a:p>
+                  </a:txBody>
+                  <a:tcPr anchor="ctr">
+                    <a:solidFill>
+                      <a:srgbClr val="E8F0FB"/>
+                    </a:solidFill>
+                  </a:tcPr>
+                </a:tc>
+                <a:tc>
+                  <a:txBody>
+                    <a:bodyPr/>
+                    <a:lstStyle/>
+                    <a:p>
+                      <a:pPr algn="l"/>
+                      <a:r>
+                        <a:rPr sz="950" b="0">
+                          <a:solidFill>
+                            <a:srgbClr val="222222"/>
+                          </a:solidFill>
+                        </a:rPr>
+                        <a:t>No crash in ~2.3h</a:t>
+                      </a:r>
+                    </a:p>
+                    <a:p>
+                      <a:pPr algn="l"/>
+                      <a:r>
+                        <a:rPr sz="950" b="0">
+                          <a:solidFill>
+                            <a:srgbClr val="222222"/>
+                          </a:solidFill>
+                        </a:rPr>
+                        <a:t>(242,043 execs, 85.31% cov.)</a:t>
+                      </a:r>
+                    </a:p>
+                  </a:txBody>
+                  <a:tcPr anchor="ctr">
+                    <a:solidFill>
+                      <a:srgbClr val="E8F0FB"/>
+                    </a:solidFill>
+                  </a:tcPr>
+                </a:tc>
+                <a:tc>
+                  <a:txBody>
+                    <a:bodyPr/>
+                    <a:lstStyle/>
+                    <a:p>
+                      <a:pPr algn="l"/>
+                      <a:r>
+                        <a:rPr sz="950" b="0">
+                          <a:solidFill>
+                            <a:srgbClr val="222222"/>
+                          </a:solidFill>
+                        </a:rPr>
+                        <a:t>No crash in ~19 min</a:t>
+                      </a:r>
+                    </a:p>
+                    <a:p>
+                      <a:pPr algn="l"/>
+                      <a:r>
+                        <a:rPr sz="950" b="0">
+                          <a:solidFill>
+                            <a:srgbClr val="222222"/>
+                          </a:solidFill>
+                        </a:rPr>
+                        <a:t>(296,317 execs, 2.10% cov.)</a:t>
+                      </a:r>
+                    </a:p>
+                  </a:txBody>
+                  <a:tcPr anchor="ctr">
+                    <a:solidFill>
+                      <a:srgbClr val="E8F0FB"/>
+                    </a:solidFill>
+                  </a:tcPr>
+                </a:tc>
+                <a:tc>
+                  <a:txBody>
+                    <a:bodyPr/>
+                    <a:lstStyle/>
+                    <a:p>
+                      <a:pPr algn="l"/>
+                      <a:r>
+                        <a:rPr sz="950" b="0">
+                          <a:solidFill>
+                            <a:srgbClr val="222222"/>
+                          </a:solidFill>
+                        </a:rPr>
+                        <a:t>Random never passed the format's magic-byte header (corpus stuck at 3 seeds, 45 cycles, 0 new edges). Added a 3rd condition to isolate why: real-bzip2-compressed random content (mechanical, no LLM) -- just 3 such seeds already reach 56.64% coverage (81/143 edges) before any mutation, confirming it was a gate-passing failure, not a hard-interior problem. Campaign in progress.</a:t>
+                      </a:r>
+                    </a:p>
+                  </a:txBody>
+                  <a:tcPr anchor="ctr">
+                    <a:solidFill>
+                      <a:srgbClr val="E8F0FB"/>
+                    </a:solidFill>
+                  </a:tcPr>
+                </a:tc>
+              </a:tr>
+              <a:tr h="822960">
+                <a:tc>
+                  <a:txBody>
+                    <a:bodyPr/>
+                    <a:lstStyle/>
+                    <a:p>
+                      <a:pPr algn="l"/>
+                      <a:r>
+                        <a:rPr sz="950" b="1">
+                          <a:solidFill>
+                            <a:srgbClr val="1B2A4A"/>
+                          </a:solidFill>
+                        </a:rPr>
+                        <a:t>CVE-2021-42386 (awk)</a:t>
+                      </a:r>
+                    </a:p>
+                  </a:txBody>
+                  <a:tcPr anchor="ctr">
+                    <a:solidFill>
+                      <a:srgbClr val="FFFFFF"/>
+                    </a:solidFill>
+                  </a:tcPr>
+                </a:tc>
+                <a:tc>
+                  <a:txBody>
+                    <a:bodyPr/>
+                    <a:lstStyle/>
+                    <a:p>
+                      <a:pPr algn="l"/>
+                      <a:r>
+                        <a:rPr sz="950" b="0">
+                          <a:solidFill>
+                            <a:srgbClr val="222222"/>
+                          </a:solidFill>
+                        </a:rPr>
+                        <a:t>No crash in ~31.7h</a:t>
+                      </a:r>
+                    </a:p>
+                    <a:p>
+                      <a:pPr algn="l"/>
+                      <a:r>
+                        <a:rPr sz="950" b="0">
+                          <a:solidFill>
+                            <a:srgbClr val="222222"/>
+                          </a:solidFill>
+                        </a:rPr>
+                        <a:t>(1,587,759 execs)</a:t>
+                      </a:r>
+                    </a:p>
+                  </a:txBody>
+                  <a:tcPr anchor="ctr">
+                    <a:solidFill>
+                      <a:srgbClr val="FFFFFF"/>
+                    </a:solidFill>
+                  </a:tcPr>
+                </a:tc>
+                <a:tc>
+                  <a:txBody>
+                    <a:bodyPr/>
+                    <a:lstStyle/>
+                    <a:p>
+                      <a:pPr algn="l"/>
+                      <a:r>
+                        <a:rPr sz="950" b="0">
+                          <a:solidFill>
+                            <a:srgbClr val="222222"/>
+                          </a:solidFill>
+                        </a:rPr>
+                        <a:t>Not yet run</a:t>
+                      </a:r>
+                    </a:p>
+                  </a:txBody>
+                  <a:tcPr anchor="ctr">
+                    <a:solidFill>
+                      <a:srgbClr val="FFFFFF"/>
+                    </a:solidFill>
+                  </a:tcPr>
+                </a:tc>
+                <a:tc>
+                  <a:txBody>
+                    <a:bodyPr/>
+                    <a:lstStyle/>
+                    <a:p>
+                      <a:pPr algn="l"/>
+                      <a:r>
+                        <a:rPr sz="950" b="0">
+                          <a:solidFill>
+                            <a:srgbClr val="222222"/>
+                          </a:solidFill>
+                        </a:rPr>
+                        <a:t>Target UAF needs a narrow alloc/free interleaving neither strategy has hit yet</a:t>
+                      </a:r>
+                    </a:p>
+                  </a:txBody>
+                  <a:tcPr anchor="ctr">
+                    <a:solidFill>
+                      <a:srgbClr val="FFFFFF"/>
+                    </a:solidFill>
+                  </a:tcPr>
+                </a:tc>
+              </a:tr>
+            </a:tbl>
+          </a:graphicData>
+        </a:graphic>
+      </p:graphicFrame>
+      <p:sp>
+        <p:nvSpPr>
+          <p:cNvPr id="5" name="TextBox 4"/>
+          <p:cNvSpPr txBox="1"/>
+          <p:nvPr/>
+        </p:nvSpPr>
+        <p:spPr>
+          <a:xfrm>
+            <a:off x="365760" y="6035040"/>
+            <a:ext cx="11430000" cy="457200"/>
+          </a:xfrm>
+          <a:prstGeom prst="rect">
+            <a:avLst/>
+          </a:prstGeom>
+          <a:noFill/>
+        </p:spPr>
+        <p:txBody>
+          <a:bodyPr wrap="square" anchor="t">
+            <a:spAutoFit/>
+          </a:bodyPr>
+          <a:lstStyle/>
+          <a:p>
+            <a:pPr algn="l"/>
+            <a:r>
+              <a:rPr sz="1200" b="0" i="1">
+                <a:solidFill>
+                  <a:srgbClr val="555555"/>
+                </a:solidFill>
+                <a:latin typeface="Calibri"/>
+              </a:rPr>
+              <a:t>Mixed result, reported plainly: blind seeding gave a large head start on man, random matched/beat it on udhcpc6, and on bunzip2 blind was the only strategy that could even pass the format's magic-byte gate. 2 of 5 comparisons still to run/finish.</a:t>
+            </a:r>
+          </a:p>
+        </p:txBody>
+      </p:sp>
+      <p:sp>
+        <p:nvSpPr>
+          <p:cNvPr id="6" name="TextBox 5"/>
+          <p:cNvSpPr txBox="1"/>
+          <p:nvPr/>
+        </p:nvSpPr>
+        <p:spPr>
+          <a:xfrm>
+            <a:off x="274320" y="6537960"/>
+            <a:ext cx="5486400" cy="274320"/>
+          </a:xfrm>
+          <a:prstGeom prst="rect">
+            <a:avLst/>
+          </a:prstGeom>
+          <a:noFill/>
+        </p:spPr>
+        <p:txBody>
+          <a:bodyPr wrap="square" anchor="t">
+            <a:spAutoFit/>
+          </a:bodyPr>
+          <a:lstStyle/>
+          <a:p>
+            <a:pPr algn="l"/>
+            <a:r>
+              <a:rPr sz="900" b="0" i="0">
+                <a:solidFill>
+                  <a:srgbClr val="555555"/>
+                </a:solidFill>
+                <a:latin typeface="Calibri"/>
+              </a:rPr>
+              <a:t>IRSS Extended Mentorship — Week 3</a:t>
+            </a:r>
+          </a:p>
+        </p:txBody>
+      </p:sp>
+      <p:sp>
+        <p:nvSpPr>
+          <p:cNvPr id="7" name="TextBox 6"/>
+          <p:cNvSpPr txBox="1"/>
+          <p:nvPr/>
+        </p:nvSpPr>
+        <p:spPr>
+          <a:xfrm>
+            <a:off x="11247120" y="6537960"/>
+            <a:ext cx="731520" cy="274320"/>
+          </a:xfrm>
+          <a:prstGeom prst="rect">
+            <a:avLst/>
+          </a:prstGeom>
+          <a:noFill/>
+        </p:spPr>
+        <p:txBody>
+          <a:bodyPr wrap="square" anchor="t">
+            <a:spAutoFit/>
+          </a:bodyPr>
+          <a:lstStyle/>
+          <a:p>
+            <a:pPr algn="r"/>
+            <a:r>
+              <a:rPr sz="900" b="0" i="0">
+                <a:solidFill>
+                  <a:srgbClr val="555555"/>
+                </a:solidFill>
+                <a:latin typeface="Calibri"/>
+              </a:rPr>
+              <a:t>5</a:t>
+            </a:r>
+          </a:p>
+        </p:txBody>
+      </p:sp>
+    </p:spTree>
+  </p:cSld>
+  <p:clrMapOvr>
+    <a:masterClrMapping/>
+  </p:clrMapOvr>
+</p:sld>
+</file>
+
+<file path=ppt/slides/slide6.xml><?xml version="1.0" encoding="utf-8"?>
 <p:sld xmlns:a="http://schemas.openxmlformats.org/drawingml/2006/main" xmlns:p="http://schemas.openxmlformats.org/presentationml/2006/main" xmlns:r="http://schemas.openxmlformats.org/officeDocument/2006/relationships">
   <p:cSld>
     <p:spTree>
@@ -6242,7 +7153,7 @@
                             <a:srgbClr val="222222"/>
                           </a:solidFill>
                         </a:rPr>
-                        <a:t>Confirmed — blind-seeded AFL campaign,</a:t>
+                        <a:t>Confirmed — blind AND random baseline</a:t>
                       </a:r>
                     </a:p>
                     <a:p>
@@ -6253,7 +7164,7 @@
                             <a:srgbClr val="222222"/>
                           </a:solidFill>
                         </a:rPr>
-                        <a:t>cross-checked absent on patched</a:t>
+                        <a:t>(both absent on patched)</a:t>
                       </a:r>
                     </a:p>
                   </a:txBody>
@@ -6343,7 +7254,7 @@
                             <a:srgbClr val="222222"/>
                           </a:solidFill>
                         </a:rPr>
-                        <a:t>Retained — static-v2 found relevant</a:t>
+                        <a:t>Accepted limitation — 3 verified</a:t>
                       </a:r>
                     </a:p>
                     <a:p>
@@ -6354,7 +7265,7 @@
                             <a:srgbClr val="222222"/>
                           </a:solidFill>
                         </a:rPr>
-                        <a:t>unchecked arithmetic, root reachability</a:t>
+                        <a:t>rounds, distinct root cause each;</a:t>
                       </a:r>
                     </a:p>
                     <a:p>
@@ -6365,7 +7276,7 @@
                             <a:srgbClr val="222222"/>
                           </a:solidFill>
                         </a:rPr>
-                        <a:t>not proven</a:t>
+                        <a:t>deferred to dynamic analysis</a:t>
                       </a:r>
                     </a:p>
                   </a:txBody>
@@ -6387,7 +7298,7 @@
                             <a:srgbClr val="222222"/>
                           </a:solidFill>
                         </a:rPr>
-                        <a:t>Not yet confirmed — real search effort,</a:t>
+                        <a:t>Neither strategy found a crash: blind</a:t>
                       </a:r>
                     </a:p>
                     <a:p>
@@ -6398,7 +7309,29 @@
                             <a:srgbClr val="222222"/>
                           </a:solidFill>
                         </a:rPr>
-                        <a:t>harness verified working, no crash found</a:t>
+                        <a:t>(2.3h) searched inside the format and</a:t>
+                      </a:r>
+                    </a:p>
+                    <a:p>
+                      <a:pPr algn="l"/>
+                      <a:r>
+                        <a:rPr sz="950" b="0">
+                          <a:solidFill>
+                            <a:srgbClr val="222222"/>
+                          </a:solidFill>
+                        </a:rPr>
+                        <a:t>found nothing; random (19min) never</a:t>
+                      </a:r>
+                    </a:p>
+                    <a:p>
+                      <a:pPr algn="l"/>
+                      <a:r>
+                        <a:rPr sz="950" b="0">
+                          <a:solidFill>
+                            <a:srgbClr val="222222"/>
+                          </a:solidFill>
+                        </a:rPr>
+                        <a:t>passed the magic-byte header at all</a:t>
                       </a:r>
                     </a:p>
                   </a:txBody>
@@ -6510,7 +7443,7 @@
                             <a:srgbClr val="222222"/>
                           </a:solidFill>
                         </a:rPr>
-                        <a:t>Confirmed — blind-seeded AFL campaign,</a:t>
+                        <a:t>Confirmed — blind AND random baseline</a:t>
                       </a:r>
                     </a:p>
                     <a:p>
@@ -6521,7 +7454,7 @@
                             <a:srgbClr val="222222"/>
                           </a:solidFill>
                         </a:rPr>
-                        <a:t>cross-checked absent on patched</a:t>
+                        <a:t>(both absent on patched)</a:t>
                       </a:r>
                     </a:p>
                   </a:txBody>
@@ -6611,7 +7544,7 @@
                             <a:srgbClr val="222222"/>
                           </a:solidFill>
                         </a:rPr>
-                        <a:t>Retained — static-v2 found both sinks,</a:t>
+                        <a:t>Accepted limitation — 3 verified</a:t>
                       </a:r>
                     </a:p>
                     <a:p>
@@ -6622,7 +7555,18 @@
                             <a:srgbClr val="222222"/>
                           </a:solidFill>
                         </a:rPr>
-                        <a:t>reachability/extent proof incomplete</a:t>
+                        <a:t>rounds, distinct root cause each;</a:t>
+                      </a:r>
+                    </a:p>
+                    <a:p>
+                      <a:pPr algn="l"/>
+                      <a:r>
+                        <a:rPr sz="950" b="0">
+                          <a:solidFill>
+                            <a:srgbClr val="222222"/>
+                          </a:solidFill>
+                        </a:rPr>
+                        <a:t>deferred to dynamic analysis</a:t>
                       </a:r>
                     </a:p>
                   </a:txBody>
@@ -6644,7 +7588,7 @@
                             <a:srgbClr val="222222"/>
                           </a:solidFill>
                         </a:rPr>
-                        <a:t>Confirmed — full blind-methodology</a:t>
+                        <a:t>Confirmed via blind (82 min); random</a:t>
                       </a:r>
                     </a:p>
                     <a:p>
@@ -6655,7 +7599,7 @@
                             <a:srgbClr val="222222"/>
                           </a:solidFill>
                         </a:rPr>
-                        <a:t>campaign, cross-checked absent on patched</a:t>
+                        <a:t>baseline running now</a:t>
                       </a:r>
                     </a:p>
                   </a:txBody>
@@ -6745,7 +7689,7 @@
                             <a:srgbClr val="222222"/>
                           </a:solidFill>
                         </a:rPr>
-                        <a:t>Force-included into static-v2;</a:t>
+                        <a:t>Force-included; all 4 required tools</a:t>
                       </a:r>
                     </a:p>
                     <a:p>
@@ -6756,7 +7700,7 @@
                             <a:srgbClr val="222222"/>
                           </a:solidFill>
                         </a:rPr>
-                        <a:t>provider content-safety failure,</a:t>
+                        <a:t>genuinely exhausted, angr timed out —</a:t>
                       </a:r>
                     </a:p>
                     <a:p>
@@ -6767,7 +7711,7 @@
                             <a:srgbClr val="222222"/>
                           </a:solidFill>
                         </a:rPr>
-                        <a:t>retained unresolved</a:t>
+                        <a:t>complete, non-starved attempt</a:t>
                       </a:r>
                     </a:p>
                   </a:txBody>
@@ -6789,7 +7733,7 @@
                             <a:srgbClr val="222222"/>
                           </a:solidFill>
                         </a:rPr>
-                        <a:t>Not yet confirmed — harness verified,</a:t>
+                        <a:t>Not yet confirmed — ~31.7h fuzzing,</a:t>
                       </a:r>
                     </a:p>
                     <a:p>
@@ -6880,7 +7824,7 @@
                 </a:solidFill>
                 <a:latin typeface="Calibri"/>
               </a:rPr>
-              <a:t>5</a:t>
+              <a:t>6</a:t>
             </a:r>
           </a:p>
         </p:txBody>

--- a/presentations/W3_progress.pptx
+++ b/presentations/W3_progress.pptx
@@ -6508,7 +6508,18 @@
                             <a:srgbClr val="222222"/>
                           </a:solidFill>
                         </a:rPr>
-                        <a:t>Running now</a:t>
+                        <a:t>No crash in ~16.3h</a:t>
+                      </a:r>
+                    </a:p>
+                    <a:p>
+                      <a:pPr algn="l"/>
+                      <a:r>
+                        <a:rPr sz="950" b="0">
+                          <a:solidFill>
+                            <a:srgbClr val="222222"/>
+                          </a:solidFill>
+                        </a:rPr>
+                        <a:t>(4,538,490 execs, 83.50% cov.)</a:t>
                       </a:r>
                     </a:p>
                   </a:txBody>
@@ -6530,7 +6541,7 @@
                             <a:srgbClr val="222222"/>
                           </a:solidFill>
                         </a:rPr>
-                        <a:t>Blind confirmed (82 min); random baseline in progress</a:t>
+                        <a:t>Same coverage ceiling as blind (83.50% both) -- not a reachability gap, a target-value search-efficiency gap: blind found it in ~80 min, random didn't in ~16.3h (~12x longer, ~26x more execs)</a:t>
                       </a:r>
                     </a:p>
                   </a:txBody>
@@ -6642,7 +6653,7 @@
                             <a:srgbClr val="222222"/>
                           </a:solidFill>
                         </a:rPr>
-                        <a:t>Random never passed the format's magic-byte header (corpus stuck at 3 seeds, 45 cycles, 0 new edges). Added a 3rd condition to isolate why: real-bzip2-compressed random content (mechanical, no LLM) -- just 3 such seeds already reach 56.64% coverage (81/143 edges) before any mutation, confirming it was a gate-passing failure, not a hard-interior problem. Campaign in progress.</a:t>
+                        <a:t>Random never passed the format's magic-byte header. Added a 3rd condition (real-bzip2-compressed random content, mechanical, no LLM): reached 84.62% coverage (121/143 edges, ~15.7h, ~4M execs) -- essentially the same ceiling as blind -- and STILL found 0 crashes. All 3 strategies agree: not an unexplored path, a specific value combination undirected mutation of any kind doesn't produce</a:t>
                       </a:r>
                     </a:p>
                   </a:txBody>
@@ -6788,7 +6799,7 @@
                 </a:solidFill>
                 <a:latin typeface="Calibri"/>
               </a:rPr>
-              <a:t>Mixed result, reported plainly: blind seeding gave a large head start on man, random matched/beat it on udhcpc6, and on bunzip2 blind was the only strategy that could even pass the format's magic-byte gate. 2 of 5 comparisons still to run/finish.</a:t>
+              <a:t>Mixed result, reported plainly: blind wins on man and unlzma, random wins on udhcpc6, and on bunzip2 all 3 strategies agree the target is unreachable by any undirected search. 4 of 5 comparisons complete; awk still running.</a:t>
             </a:r>
           </a:p>
         </p:txBody>
@@ -7298,7 +7309,7 @@
                             <a:srgbClr val="222222"/>
                           </a:solidFill>
                         </a:rPr>
-                        <a:t>Neither strategy found a crash: blind</a:t>
+                        <a:t>All 3 strategies agree: blind, random,</a:t>
                       </a:r>
                     </a:p>
                     <a:p>
@@ -7309,7 +7320,7 @@
                             <a:srgbClr val="222222"/>
                           </a:solidFill>
                         </a:rPr>
-                        <a:t>(2.3h) searched inside the format and</a:t>
+                        <a:t>and format-valid-random (84.62% cov.,</a:t>
                       </a:r>
                     </a:p>
                     <a:p>
@@ -7320,7 +7331,7 @@
                             <a:srgbClr val="222222"/>
                           </a:solidFill>
                         </a:rPr>
-                        <a:t>found nothing; random (19min) never</a:t>
+                        <a:t>~15.7h) all found 0 crashes -- not an</a:t>
                       </a:r>
                     </a:p>
                     <a:p>
@@ -7331,7 +7342,7 @@
                             <a:srgbClr val="222222"/>
                           </a:solidFill>
                         </a:rPr>
-                        <a:t>passed the magic-byte header at all</a:t>
+                        <a:t>unexplored path, an unreachable value</a:t>
                       </a:r>
                     </a:p>
                   </a:txBody>
@@ -7599,7 +7610,18 @@
                             <a:srgbClr val="222222"/>
                           </a:solidFill>
                         </a:rPr>
-                        <a:t>baseline running now</a:t>
+                        <a:t>found 0 crashes in 16.3h despite same</a:t>
+                      </a:r>
+                    </a:p>
+                    <a:p>
+                      <a:pPr algn="l"/>
+                      <a:r>
+                        <a:rPr sz="950" b="0">
+                          <a:solidFill>
+                            <a:srgbClr val="222222"/>
+                          </a:solidFill>
+                        </a:rPr>
+                        <a:t>coverage ceiling (83.50% both)</a:t>
                       </a:r>
                     </a:p>
                   </a:txBody>
